--- a/sunriseRobot/app_SunriseRobot/info/vr_controller_map_it.pptx
+++ b/sunriseRobot/app_SunriseRobot/info/vr_controller_map_it.pptx
@@ -4540,6 +4540,162 @@
               <a:rPr lang="en-US" dirty="0"/>
               <a:t>Joystick Destro: Start</a:t>
             </a:r>
+          </a:p>
+        </p:txBody>
+      </p:sp>
+      <p:sp>
+        <p:nvSpPr>
+          <p:cNvPr id="6" name="Rectangle 5">
+            <a:extLst>
+              <a:ext uri="{FF2B5EF4-FFF2-40B4-BE49-F238E27FC236}">
+                <a16:creationId xmlns:a16="http://schemas.microsoft.com/office/drawing/2014/main" id="{AFEE5ECF-09A3-B3BD-7088-79DEDD02FAB3}"/>
+              </a:ext>
+            </a:extLst>
+          </p:cNvPr>
+          <p:cNvSpPr/>
+          <p:nvPr/>
+        </p:nvSpPr>
+        <p:spPr>
+          <a:xfrm>
+            <a:off x="3668338" y="3920412"/>
+            <a:ext cx="1242433" cy="1077831"/>
+          </a:xfrm>
+          <a:prstGeom prst="rect">
+            <a:avLst/>
+          </a:prstGeom>
+          <a:noFill/>
+          <a:ln w="38100">
+            <a:solidFill>
+              <a:srgbClr val="FF0000"/>
+            </a:solidFill>
+          </a:ln>
+        </p:spPr>
+        <p:style>
+          <a:lnRef idx="2">
+            <a:schemeClr val="accent1">
+              <a:shade val="15000"/>
+            </a:schemeClr>
+          </a:lnRef>
+          <a:fillRef idx="1">
+            <a:schemeClr val="accent1"/>
+          </a:fillRef>
+          <a:effectRef idx="0">
+            <a:schemeClr val="accent1"/>
+          </a:effectRef>
+          <a:fontRef idx="minor">
+            <a:schemeClr val="lt1"/>
+          </a:fontRef>
+        </p:style>
+        <p:txBody>
+          <a:bodyPr rtlCol="0" anchor="ctr"/>
+          <a:lstStyle/>
+          <a:p>
+            <a:pPr algn="ctr"/>
+            <a:endParaRPr lang="en-US"/>
+          </a:p>
+        </p:txBody>
+      </p:sp>
+      <p:cxnSp>
+        <p:nvCxnSpPr>
+          <p:cNvPr id="7" name="Connector: Elbow 6">
+            <a:extLst>
+              <a:ext uri="{FF2B5EF4-FFF2-40B4-BE49-F238E27FC236}">
+                <a16:creationId xmlns:a16="http://schemas.microsoft.com/office/drawing/2014/main" id="{AE13F655-401A-DB57-A194-3C15BD467923}"/>
+              </a:ext>
+            </a:extLst>
+          </p:cNvPr>
+          <p:cNvCxnSpPr>
+            <a:cxnSpLocks/>
+            <a:stCxn id="8" idx="3"/>
+            <a:endCxn id="6" idx="1"/>
+          </p:cNvCxnSpPr>
+          <p:nvPr/>
+        </p:nvCxnSpPr>
+        <p:spPr>
+          <a:xfrm flipV="1">
+            <a:off x="2182981" y="4459328"/>
+            <a:ext cx="1485357" cy="1662839"/>
+          </a:xfrm>
+          <a:prstGeom prst="bentConnector3">
+            <a:avLst>
+              <a:gd name="adj1" fmla="val 50000"/>
+            </a:avLst>
+          </a:prstGeom>
+          <a:ln w="38100">
+            <a:solidFill>
+              <a:srgbClr val="FF0000"/>
+            </a:solidFill>
+          </a:ln>
+        </p:spPr>
+        <p:style>
+          <a:lnRef idx="2">
+            <a:schemeClr val="accent1"/>
+          </a:lnRef>
+          <a:fillRef idx="0">
+            <a:schemeClr val="accent1"/>
+          </a:fillRef>
+          <a:effectRef idx="1">
+            <a:schemeClr val="accent1"/>
+          </a:effectRef>
+          <a:fontRef idx="minor">
+            <a:schemeClr val="tx1"/>
+          </a:fontRef>
+        </p:style>
+      </p:cxnSp>
+      <p:sp>
+        <p:nvSpPr>
+          <p:cNvPr id="8" name="TextBox 7">
+            <a:extLst>
+              <a:ext uri="{FF2B5EF4-FFF2-40B4-BE49-F238E27FC236}">
+                <a16:creationId xmlns:a16="http://schemas.microsoft.com/office/drawing/2014/main" id="{26861C91-1D58-4144-C6E4-CF5BD3FB1C2B}"/>
+              </a:ext>
+            </a:extLst>
+          </p:cNvPr>
+          <p:cNvSpPr txBox="1"/>
+          <p:nvPr/>
+        </p:nvSpPr>
+        <p:spPr>
+          <a:xfrm>
+            <a:off x="569488" y="5660502"/>
+            <a:ext cx="1613493" cy="923330"/>
+          </a:xfrm>
+          <a:prstGeom prst="rect">
+            <a:avLst/>
+          </a:prstGeom>
+          <a:noFill/>
+          <a:ln w="28575">
+            <a:solidFill>
+              <a:srgbClr val="FF0000"/>
+            </a:solidFill>
+          </a:ln>
+        </p:spPr>
+        <p:txBody>
+          <a:bodyPr wrap="square" rtlCol="0">
+            <a:spAutoFit/>
+          </a:bodyPr>
+          <a:lstStyle/>
+          <a:p>
+            <a:r>
+              <a:rPr lang="en-US" b="1" noProof="0" dirty="0"/>
+              <a:t>Non </a:t>
+            </a:r>
+            <a:r>
+              <a:rPr lang="en-US" b="1" noProof="0" dirty="0" err="1"/>
+              <a:t>mappati</a:t>
+            </a:r>
+            <a:r>
+              <a:rPr lang="en-US" b="1" noProof="0" dirty="0"/>
+              <a:t> </a:t>
+            </a:r>
+            <a:r>
+              <a:rPr lang="en-US" b="1" noProof="0" dirty="0" err="1"/>
+              <a:t>nei</a:t>
+            </a:r>
+            <a:r>
+              <a:rPr lang="en-US" b="1" noProof="0" dirty="0"/>
+              <a:t> controller del VR!</a:t>
+            </a:r>
+            <a:endParaRPr lang="en-US" sz="1600" noProof="0" dirty="0"/>
           </a:p>
         </p:txBody>
       </p:sp>

--- a/sunriseRobot/app_SunriseRobot/info/vr_controller_map_it.pptx
+++ b/sunriseRobot/app_SunriseRobot/info/vr_controller_map_it.pptx
@@ -259,7 +259,7 @@
           <a:p>
             <a:fld id="{60B78028-44F6-416E-B0AB-FAA3EA91683A}" type="datetimeFigureOut">
               <a:rPr lang="en-US" smtClean="0"/>
-              <a:t>4/6/2026</a:t>
+              <a:t>4/15/2026</a:t>
             </a:fld>
             <a:endParaRPr lang="en-US"/>
           </a:p>
@@ -457,7 +457,7 @@
           <a:p>
             <a:fld id="{60B78028-44F6-416E-B0AB-FAA3EA91683A}" type="datetimeFigureOut">
               <a:rPr lang="en-US" smtClean="0"/>
-              <a:t>4/6/2026</a:t>
+              <a:t>4/15/2026</a:t>
             </a:fld>
             <a:endParaRPr lang="en-US"/>
           </a:p>
@@ -665,7 +665,7 @@
           <a:p>
             <a:fld id="{60B78028-44F6-416E-B0AB-FAA3EA91683A}" type="datetimeFigureOut">
               <a:rPr lang="en-US" smtClean="0"/>
-              <a:t>4/6/2026</a:t>
+              <a:t>4/15/2026</a:t>
             </a:fld>
             <a:endParaRPr lang="en-US"/>
           </a:p>
@@ -863,7 +863,7 @@
           <a:p>
             <a:fld id="{60B78028-44F6-416E-B0AB-FAA3EA91683A}" type="datetimeFigureOut">
               <a:rPr lang="en-US" smtClean="0"/>
-              <a:t>4/6/2026</a:t>
+              <a:t>4/15/2026</a:t>
             </a:fld>
             <a:endParaRPr lang="en-US"/>
           </a:p>
@@ -1138,7 +1138,7 @@
           <a:p>
             <a:fld id="{60B78028-44F6-416E-B0AB-FAA3EA91683A}" type="datetimeFigureOut">
               <a:rPr lang="en-US" smtClean="0"/>
-              <a:t>4/6/2026</a:t>
+              <a:t>4/15/2026</a:t>
             </a:fld>
             <a:endParaRPr lang="en-US"/>
           </a:p>
@@ -1403,7 +1403,7 @@
           <a:p>
             <a:fld id="{60B78028-44F6-416E-B0AB-FAA3EA91683A}" type="datetimeFigureOut">
               <a:rPr lang="en-US" smtClean="0"/>
-              <a:t>4/6/2026</a:t>
+              <a:t>4/15/2026</a:t>
             </a:fld>
             <a:endParaRPr lang="en-US"/>
           </a:p>
@@ -1815,7 +1815,7 @@
           <a:p>
             <a:fld id="{60B78028-44F6-416E-B0AB-FAA3EA91683A}" type="datetimeFigureOut">
               <a:rPr lang="en-US" smtClean="0"/>
-              <a:t>4/6/2026</a:t>
+              <a:t>4/15/2026</a:t>
             </a:fld>
             <a:endParaRPr lang="en-US"/>
           </a:p>
@@ -1956,7 +1956,7 @@
           <a:p>
             <a:fld id="{60B78028-44F6-416E-B0AB-FAA3EA91683A}" type="datetimeFigureOut">
               <a:rPr lang="en-US" smtClean="0"/>
-              <a:t>4/6/2026</a:t>
+              <a:t>4/15/2026</a:t>
             </a:fld>
             <a:endParaRPr lang="en-US"/>
           </a:p>
@@ -2069,7 +2069,7 @@
           <a:p>
             <a:fld id="{60B78028-44F6-416E-B0AB-FAA3EA91683A}" type="datetimeFigureOut">
               <a:rPr lang="en-US" smtClean="0"/>
-              <a:t>4/6/2026</a:t>
+              <a:t>4/15/2026</a:t>
             </a:fld>
             <a:endParaRPr lang="en-US"/>
           </a:p>
@@ -2380,7 +2380,7 @@
           <a:p>
             <a:fld id="{60B78028-44F6-416E-B0AB-FAA3EA91683A}" type="datetimeFigureOut">
               <a:rPr lang="en-US" smtClean="0"/>
-              <a:t>4/6/2026</a:t>
+              <a:t>4/15/2026</a:t>
             </a:fld>
             <a:endParaRPr lang="en-US"/>
           </a:p>
@@ -2668,7 +2668,7 @@
           <a:p>
             <a:fld id="{60B78028-44F6-416E-B0AB-FAA3EA91683A}" type="datetimeFigureOut">
               <a:rPr lang="en-US" smtClean="0"/>
-              <a:t>4/6/2026</a:t>
+              <a:t>4/15/2026</a:t>
             </a:fld>
             <a:endParaRPr lang="en-US"/>
           </a:p>
@@ -2909,7 +2909,7 @@
           <a:p>
             <a:fld id="{60B78028-44F6-416E-B0AB-FAA3EA91683A}" type="datetimeFigureOut">
               <a:rPr lang="en-US" smtClean="0"/>
-              <a:t>4/6/2026</a:t>
+              <a:t>4/15/2026</a:t>
             </a:fld>
             <a:endParaRPr lang="en-US"/>
           </a:p>
@@ -3340,8 +3340,8 @@
         </p:nvSpPr>
         <p:spPr>
           <a:xfrm>
-            <a:off x="2631622" y="0"/>
-            <a:ext cx="6928756" cy="523220"/>
+            <a:off x="2000009" y="0"/>
+            <a:ext cx="8191987" cy="523220"/>
           </a:xfrm>
           <a:prstGeom prst="rect">
             <a:avLst/>
@@ -3356,8 +3356,20 @@
           <a:p>
             <a:pPr algn="ctr"/>
             <a:r>
+              <a:rPr lang="en-US" sz="2800" b="1" noProof="0" dirty="0" err="1"/>
+              <a:t>Corrispondenza</a:t>
+            </a:r>
+            <a:r>
               <a:rPr lang="en-US" sz="2800" b="1" noProof="0" dirty="0"/>
-              <a:t>Map from VR controllers to PS2 controller</a:t>
+              <a:t> </a:t>
+            </a:r>
+            <a:r>
+              <a:rPr lang="en-US" sz="2800" b="1" noProof="0" dirty="0" err="1"/>
+              <a:t>fra</a:t>
+            </a:r>
+            <a:r>
+              <a:rPr lang="en-US" sz="2800" b="1" noProof="0" dirty="0"/>
+              <a:t> VR controller e PS2 controller</a:t>
             </a:r>
           </a:p>
         </p:txBody>
@@ -4441,8 +4453,8 @@
         </p:nvSpPr>
         <p:spPr>
           <a:xfrm>
-            <a:off x="3444185" y="795952"/>
-            <a:ext cx="2099217" cy="646331"/>
+            <a:off x="3537300" y="1076579"/>
+            <a:ext cx="945509" cy="369332"/>
           </a:xfrm>
           <a:prstGeom prst="rect">
             <a:avLst/>
@@ -4462,84 +4474,9 @@
           <a:p>
             <a:r>
               <a:rPr lang="en-US" b="1" dirty="0"/>
-              <a:t>CLICK </a:t>
-            </a:r>
-            <a:r>
-              <a:rPr lang="en-US" dirty="0"/>
-              <a:t>con</a:t>
-            </a:r>
-            <a:r>
-              <a:rPr lang="en-US" b="1" dirty="0"/>
-              <a:t> </a:t>
-            </a:r>
-            <a:r>
-              <a:rPr lang="en-US" noProof="0" dirty="0"/>
-              <a:t>Joystick </a:t>
-            </a:r>
-            <a:r>
-              <a:rPr lang="en-US" noProof="0" dirty="0" err="1"/>
-              <a:t>Sinistro</a:t>
-            </a:r>
-            <a:r>
-              <a:rPr lang="en-US" dirty="0"/>
-              <a:t>: </a:t>
-            </a:r>
-            <a:r>
-              <a:rPr lang="en-US" noProof="0" dirty="0"/>
-              <a:t>Select</a:t>
-            </a:r>
-          </a:p>
-        </p:txBody>
-      </p:sp>
-      <p:sp>
-        <p:nvSpPr>
-          <p:cNvPr id="1083" name="TextBox 1082">
-            <a:extLst>
-              <a:ext uri="{FF2B5EF4-FFF2-40B4-BE49-F238E27FC236}">
-                <a16:creationId xmlns:a16="http://schemas.microsoft.com/office/drawing/2014/main" id="{C8A56F52-85D4-E62D-25B8-3D9F9F2E8A4A}"/>
-              </a:ext>
-            </a:extLst>
-          </p:cNvPr>
-          <p:cNvSpPr txBox="1"/>
-          <p:nvPr/>
-        </p:nvSpPr>
-        <p:spPr>
-          <a:xfrm>
-            <a:off x="6602354" y="795952"/>
-            <a:ext cx="2099217" cy="646331"/>
-          </a:xfrm>
-          <a:prstGeom prst="rect">
-            <a:avLst/>
-          </a:prstGeom>
-          <a:noFill/>
-          <a:ln w="28575">
-            <a:solidFill>
-              <a:srgbClr val="FFC000"/>
-            </a:solidFill>
-          </a:ln>
-        </p:spPr>
-        <p:txBody>
-          <a:bodyPr wrap="square" rtlCol="0">
-            <a:spAutoFit/>
-          </a:bodyPr>
-          <a:lstStyle/>
-          <a:p>
-            <a:r>
-              <a:rPr lang="en-US" b="1" dirty="0"/>
-              <a:t>CLICK </a:t>
-            </a:r>
-            <a:r>
-              <a:rPr lang="en-US" dirty="0"/>
-              <a:t>con</a:t>
-            </a:r>
-            <a:r>
-              <a:rPr lang="en-US" b="1" dirty="0"/>
-              <a:t> </a:t>
-            </a:r>
-            <a:r>
-              <a:rPr lang="en-US" dirty="0"/>
-              <a:t>Joystick Destro: Start</a:t>
-            </a:r>
+              <a:t>CLICK</a:t>
+            </a:r>
+            <a:endParaRPr lang="en-US" noProof="0" dirty="0"/>
           </a:p>
         </p:txBody>
       </p:sp>
@@ -4696,6 +4633,262 @@
               <a:t> controller del VR!</a:t>
             </a:r>
             <a:endParaRPr lang="en-US" sz="1600" noProof="0" dirty="0"/>
+          </a:p>
+        </p:txBody>
+      </p:sp>
+      <p:sp>
+        <p:nvSpPr>
+          <p:cNvPr id="2" name="TextBox 1">
+            <a:extLst>
+              <a:ext uri="{FF2B5EF4-FFF2-40B4-BE49-F238E27FC236}">
+                <a16:creationId xmlns:a16="http://schemas.microsoft.com/office/drawing/2014/main" id="{AEFCD3C3-3CB1-2125-0119-F7CD2C5207DD}"/>
+              </a:ext>
+            </a:extLst>
+          </p:cNvPr>
+          <p:cNvSpPr txBox="1"/>
+          <p:nvPr/>
+        </p:nvSpPr>
+        <p:spPr>
+          <a:xfrm>
+            <a:off x="7673126" y="1076559"/>
+            <a:ext cx="945509" cy="369332"/>
+          </a:xfrm>
+          <a:prstGeom prst="rect">
+            <a:avLst/>
+          </a:prstGeom>
+          <a:noFill/>
+          <a:ln w="28575">
+            <a:solidFill>
+              <a:srgbClr val="FFC000"/>
+            </a:solidFill>
+          </a:ln>
+        </p:spPr>
+        <p:txBody>
+          <a:bodyPr wrap="square" rtlCol="0">
+            <a:spAutoFit/>
+          </a:bodyPr>
+          <a:lstStyle/>
+          <a:p>
+            <a:r>
+              <a:rPr lang="en-US" b="1" dirty="0"/>
+              <a:t>CLICK</a:t>
+            </a:r>
+            <a:endParaRPr lang="en-US" noProof="0" dirty="0"/>
+          </a:p>
+        </p:txBody>
+      </p:sp>
+      <p:sp>
+        <p:nvSpPr>
+          <p:cNvPr id="3" name="TextBox 2">
+            <a:extLst>
+              <a:ext uri="{FF2B5EF4-FFF2-40B4-BE49-F238E27FC236}">
+                <a16:creationId xmlns:a16="http://schemas.microsoft.com/office/drawing/2014/main" id="{4DA73FA3-530C-A178-90C8-AD284A0F36F3}"/>
+              </a:ext>
+            </a:extLst>
+          </p:cNvPr>
+          <p:cNvSpPr txBox="1"/>
+          <p:nvPr/>
+        </p:nvSpPr>
+        <p:spPr>
+          <a:xfrm>
+            <a:off x="1132583" y="4440790"/>
+            <a:ext cx="814339" cy="369332"/>
+          </a:xfrm>
+          <a:prstGeom prst="rect">
+            <a:avLst/>
+          </a:prstGeom>
+          <a:noFill/>
+          <a:ln w="28575">
+            <a:solidFill>
+              <a:srgbClr val="00B050"/>
+            </a:solidFill>
+          </a:ln>
+        </p:spPr>
+        <p:txBody>
+          <a:bodyPr wrap="square" rtlCol="0">
+            <a:spAutoFit/>
+          </a:bodyPr>
+          <a:lstStyle/>
+          <a:p>
+            <a:r>
+              <a:rPr lang="en-US" b="1" dirty="0"/>
+              <a:t>MOVE</a:t>
+            </a:r>
+            <a:endParaRPr lang="en-US" noProof="0" dirty="0"/>
+          </a:p>
+        </p:txBody>
+      </p:sp>
+      <p:sp>
+        <p:nvSpPr>
+          <p:cNvPr id="5" name="TextBox 4">
+            <a:extLst>
+              <a:ext uri="{FF2B5EF4-FFF2-40B4-BE49-F238E27FC236}">
+                <a16:creationId xmlns:a16="http://schemas.microsoft.com/office/drawing/2014/main" id="{EAECF89C-E2F2-4AE2-29EA-7FFEAF976A11}"/>
+              </a:ext>
+            </a:extLst>
+          </p:cNvPr>
+          <p:cNvSpPr txBox="1"/>
+          <p:nvPr/>
+        </p:nvSpPr>
+        <p:spPr>
+          <a:xfrm>
+            <a:off x="9372335" y="5433098"/>
+            <a:ext cx="814339" cy="369332"/>
+          </a:xfrm>
+          <a:prstGeom prst="rect">
+            <a:avLst/>
+          </a:prstGeom>
+          <a:noFill/>
+          <a:ln w="28575">
+            <a:solidFill>
+              <a:srgbClr val="00B050"/>
+            </a:solidFill>
+          </a:ln>
+        </p:spPr>
+        <p:txBody>
+          <a:bodyPr wrap="square" rtlCol="0">
+            <a:spAutoFit/>
+          </a:bodyPr>
+          <a:lstStyle/>
+          <a:p>
+            <a:r>
+              <a:rPr lang="en-US" b="1" dirty="0"/>
+              <a:t>MOVE</a:t>
+            </a:r>
+            <a:endParaRPr lang="en-US" noProof="0" dirty="0"/>
+          </a:p>
+        </p:txBody>
+      </p:sp>
+      <p:cxnSp>
+        <p:nvCxnSpPr>
+          <p:cNvPr id="11" name="Straight Connector 10">
+            <a:extLst>
+              <a:ext uri="{FF2B5EF4-FFF2-40B4-BE49-F238E27FC236}">
+                <a16:creationId xmlns:a16="http://schemas.microsoft.com/office/drawing/2014/main" id="{269074D8-C846-B72B-9809-02ACE2939671}"/>
+              </a:ext>
+            </a:extLst>
+          </p:cNvPr>
+          <p:cNvCxnSpPr>
+            <a:cxnSpLocks/>
+            <a:endCxn id="17" idx="2"/>
+          </p:cNvCxnSpPr>
+          <p:nvPr/>
+        </p:nvCxnSpPr>
+        <p:spPr>
+          <a:xfrm flipH="1" flipV="1">
+            <a:off x="6440855" y="1259805"/>
+            <a:ext cx="169896" cy="245528"/>
+          </a:xfrm>
+          <a:prstGeom prst="line">
+            <a:avLst/>
+          </a:prstGeom>
+          <a:ln w="38100">
+            <a:solidFill>
+              <a:srgbClr val="FFC000"/>
+            </a:solidFill>
+          </a:ln>
+        </p:spPr>
+        <p:style>
+          <a:lnRef idx="2">
+            <a:schemeClr val="accent1"/>
+          </a:lnRef>
+          <a:fillRef idx="0">
+            <a:schemeClr val="accent1"/>
+          </a:fillRef>
+          <a:effectRef idx="1">
+            <a:schemeClr val="accent1"/>
+          </a:effectRef>
+          <a:fontRef idx="minor">
+            <a:schemeClr val="tx1"/>
+          </a:fontRef>
+        </p:style>
+      </p:cxnSp>
+      <p:sp>
+        <p:nvSpPr>
+          <p:cNvPr id="17" name="TextBox 16">
+            <a:extLst>
+              <a:ext uri="{FF2B5EF4-FFF2-40B4-BE49-F238E27FC236}">
+                <a16:creationId xmlns:a16="http://schemas.microsoft.com/office/drawing/2014/main" id="{1DE90883-61AE-9EAA-2989-2AF17CCC454F}"/>
+              </a:ext>
+            </a:extLst>
+          </p:cNvPr>
+          <p:cNvSpPr txBox="1"/>
+          <p:nvPr/>
+        </p:nvSpPr>
+        <p:spPr>
+          <a:xfrm>
+            <a:off x="5383117" y="521141"/>
+            <a:ext cx="2115475" cy="738664"/>
+          </a:xfrm>
+          <a:prstGeom prst="rect">
+            <a:avLst/>
+          </a:prstGeom>
+          <a:noFill/>
+          <a:ln w="28575">
+            <a:solidFill>
+              <a:srgbClr val="FFC000"/>
+            </a:solidFill>
+          </a:ln>
+        </p:spPr>
+        <p:txBody>
+          <a:bodyPr wrap="square" rtlCol="0">
+            <a:spAutoFit/>
+          </a:bodyPr>
+          <a:lstStyle/>
+          <a:p>
+            <a:r>
+              <a:rPr lang="en-US" sz="1400" noProof="0" dirty="0" err="1"/>
+              <a:t>Oltre</a:t>
+            </a:r>
+            <a:r>
+              <a:rPr lang="en-US" sz="1400" noProof="0" dirty="0"/>
+              <a:t> ad </a:t>
+            </a:r>
+            <a:r>
+              <a:rPr lang="en-US" sz="1400" noProof="0" dirty="0" err="1"/>
+              <a:t>inviare</a:t>
+            </a:r>
+            <a:r>
+              <a:rPr lang="en-US" sz="1400" noProof="0" dirty="0"/>
+              <a:t> il </a:t>
+            </a:r>
+            <a:r>
+              <a:rPr lang="en-US" sz="1400" noProof="0" dirty="0" err="1"/>
+              <a:t>segnale</a:t>
+            </a:r>
+            <a:r>
+              <a:rPr lang="en-US" sz="1400" noProof="0" dirty="0"/>
+              <a:t> “</a:t>
+            </a:r>
+            <a:r>
+              <a:rPr lang="en-US" sz="1400" b="1" noProof="0" dirty="0"/>
+              <a:t>start</a:t>
+            </a:r>
+            <a:r>
+              <a:rPr lang="en-US" sz="1400" noProof="0" dirty="0"/>
+              <a:t>” al robot, </a:t>
+            </a:r>
+            <a:r>
+              <a:rPr lang="en-US" sz="1400" noProof="0" dirty="0" err="1"/>
+              <a:t>apre</a:t>
+            </a:r>
+            <a:r>
+              <a:rPr lang="en-US" sz="1400" dirty="0"/>
+              <a:t> il </a:t>
+            </a:r>
+            <a:r>
+              <a:rPr lang="en-US" sz="1400" dirty="0" err="1"/>
+              <a:t>pannello</a:t>
+            </a:r>
+            <a:r>
+              <a:rPr lang="en-US" sz="1400" dirty="0"/>
+              <a:t> </a:t>
+            </a:r>
+            <a:r>
+              <a:rPr lang="en-US" sz="1400"/>
+              <a:t>di debugging</a:t>
+            </a:r>
+            <a:endParaRPr lang="en-US" sz="1400" noProof="0" dirty="0"/>
           </a:p>
         </p:txBody>
       </p:sp>
